--- a/site/clases/parte-5-ingenieria-de-datos/211-polars-como-alternativa-moderna/clase-211-polars-como-alternativa-moderna-presentacion.pptx
+++ b/site/clases/parte-5-ingenieria-de-datos/211-polars-como-alternativa-moderna/clase-211-polars-como-alternativa-moderna-presentacion.pptx
@@ -3272,7 +3272,7 @@
                 </a:solidFill>
                 <a:latin typeface="Segoe UI"/>
               </a:rPr>
-              <a:t>Parte: 5 — Ingeniería de Datos · Fuente: docs Polars + Polars vs pandas benchmark.  Duración estimada: 75 min. · Esta clase es complementaria a la Clase 008 (Polars básico, Parte 0). Acá el foco es producción: lazy API, streaming engine, Arrow zero-copy, integración con DuckDB/Parquet.</a:t>
+              <a:t>Parte: 5 — Ingeniería de Datos · Fuente: docs Polars + Polars vs pandas benchmark.  Duración estimada: 75 min. · Nivel: Intermedio-Avanzado · Esta clase es complementaria a la Clase 008 (Polars básico, Parte 0). Acá el foco es producción: lazy API, streaming engine, Arrow zero-copy, integración con DuckDB/Parquet.</a:t>
             </a:r>
           </a:p>
         </p:txBody>
@@ -3581,7 +3581,7 @@
                 </a:solidFill>
                 <a:latin typeface="Segoe UI"/>
               </a:rPr>
-              <a:t>Parte: 5 — Ingeniería de Datos · Fuente: docs Polars + Polars vs pandas benchmark.  Duración estimada: 75 min. · Esta clase es complementaria a la Clase 008 (Polars básico, Parte 0). Acá el foco es producción: lazy API, streaming engine, Arrow zero-copy, integración con DuckDB/Parquet.</a:t>
+              <a:t>Parte: 5 — Ingeniería de Datos · Fuente: docs Polars + Polars vs pandas benchmark.  Duración estimada: 75 min. · Nivel: Intermedio-Avanzado · Esta clase es complementaria a la Clase 008 (Polars básico, Parte 0). Acá el foco es producción: lazy API, streaming engine, Arrow zero-copy, integración con DuckDB/Parquet.</a:t>
             </a:r>
           </a:p>
         </p:txBody>
